--- a/PRESENTAZIONI/LLM PER SO(Risultati-Es4).pptx
+++ b/PRESENTAZIONI/LLM PER SO(Risultati-Es4).pptx
@@ -131,12 +131,20 @@
 </p:presentation>
 </file>
 
+<file path=ppt/revisionInfo.xml><?xml version="1.0" encoding="utf-8"?>
+<p1510:revInfo xmlns:a="http://schemas.openxmlformats.org/drawingml/2006/main" xmlns:r="http://schemas.openxmlformats.org/officeDocument/2006/relationships" xmlns:p1510="http://schemas.microsoft.com/office/powerpoint/2015/10/main">
+  <p1510:revLst>
+    <p1510:client id="{F28FF7BC-3909-4CA2-979A-83531C6E4E6B}" v="2" dt="2026-04-29T09:28:08.868"/>
+  </p1510:revLst>
+</p1510:revInfo>
+</file>
+
 <file path=ppt/changesInfos/changesInfo1.xml><?xml version="1.0" encoding="utf-8"?>
 <pc:chgInfo xmlns:a="http://schemas.openxmlformats.org/drawingml/2006/main" xmlns:r="http://schemas.openxmlformats.org/officeDocument/2006/relationships" xmlns:ac="http://schemas.microsoft.com/office/drawing/2013/main/command" xmlns:pc="http://schemas.microsoft.com/office/powerpoint/2013/main/command">
   <pc:docChgLst>
     <pc:chgData name="Andrea Esposito" userId="af663d4e0f6c8da9" providerId="LiveId" clId="{262502FB-FC54-43DB-AB78-73175A28E98A}"/>
     <pc:docChg chg="undo redo custSel addSld delSld modSld sldOrd">
-      <pc:chgData name="Andrea Esposito" userId="af663d4e0f6c8da9" providerId="LiveId" clId="{262502FB-FC54-43DB-AB78-73175A28E98A}" dt="2026-04-26T09:22:07.176" v="13100"/>
+      <pc:chgData name="Andrea Esposito" userId="af663d4e0f6c8da9" providerId="LiveId" clId="{262502FB-FC54-43DB-AB78-73175A28E98A}" dt="2026-04-29T09:28:08.868" v="13102" actId="14826"/>
       <pc:docMkLst>
         <pc:docMk/>
       </pc:docMkLst>
@@ -248,7 +256,7 @@
         </pc:picChg>
       </pc:sldChg>
       <pc:sldChg chg="modSp mod">
-        <pc:chgData name="Andrea Esposito" userId="af663d4e0f6c8da9" providerId="LiveId" clId="{262502FB-FC54-43DB-AB78-73175A28E98A}" dt="2026-04-24T07:29:31.987" v="12774" actId="14826"/>
+        <pc:chgData name="Andrea Esposito" userId="af663d4e0f6c8da9" providerId="LiveId" clId="{262502FB-FC54-43DB-AB78-73175A28E98A}" dt="2026-04-29T09:28:08.868" v="13102" actId="14826"/>
         <pc:sldMkLst>
           <pc:docMk/>
           <pc:sldMk cId="4184518395" sldId="281"/>
@@ -262,7 +270,7 @@
           </ac:spMkLst>
         </pc:spChg>
         <pc:picChg chg="mod">
-          <ac:chgData name="Andrea Esposito" userId="af663d4e0f6c8da9" providerId="LiveId" clId="{262502FB-FC54-43DB-AB78-73175A28E98A}" dt="2026-04-24T07:29:31.987" v="12774" actId="14826"/>
+          <ac:chgData name="Andrea Esposito" userId="af663d4e0f6c8da9" providerId="LiveId" clId="{262502FB-FC54-43DB-AB78-73175A28E98A}" dt="2026-04-29T09:28:08.868" v="13102" actId="14826"/>
           <ac:picMkLst>
             <pc:docMk/>
             <pc:sldMk cId="4184518395" sldId="281"/>
@@ -271,7 +279,7 @@
         </pc:picChg>
       </pc:sldChg>
       <pc:sldChg chg="addSp delSp modSp mod">
-        <pc:chgData name="Andrea Esposito" userId="af663d4e0f6c8da9" providerId="LiveId" clId="{262502FB-FC54-43DB-AB78-73175A28E98A}" dt="2026-04-24T07:29:44.385" v="12775" actId="14826"/>
+        <pc:chgData name="Andrea Esposito" userId="af663d4e0f6c8da9" providerId="LiveId" clId="{262502FB-FC54-43DB-AB78-73175A28E98A}" dt="2026-04-29T09:27:53.807" v="13101" actId="14826"/>
         <pc:sldMkLst>
           <pc:docMk/>
           <pc:sldMk cId="1134298706" sldId="282"/>
@@ -285,7 +293,7 @@
           </ac:spMkLst>
         </pc:spChg>
         <pc:picChg chg="mod modCrop">
-          <ac:chgData name="Andrea Esposito" userId="af663d4e0f6c8da9" providerId="LiveId" clId="{262502FB-FC54-43DB-AB78-73175A28E98A}" dt="2026-04-24T07:29:44.385" v="12775" actId="14826"/>
+          <ac:chgData name="Andrea Esposito" userId="af663d4e0f6c8da9" providerId="LiveId" clId="{262502FB-FC54-43DB-AB78-73175A28E98A}" dt="2026-04-29T09:27:53.807" v="13101" actId="14826"/>
           <ac:picMkLst>
             <pc:docMk/>
             <pc:sldMk cId="1134298706" sldId="282"/>
@@ -611,7 +619,7 @@
           <a:p>
             <a:fld id="{AAAB00D7-A12E-4179-B4FE-A225F398F237}" type="datetimeFigureOut">
               <a:rPr lang="it-IT" smtClean="0"/>
-              <a:t>26/04/2026</a:t>
+              <a:t>29/04/2026</a:t>
             </a:fld>
             <a:endParaRPr lang="it-IT"/>
           </a:p>
@@ -1061,7 +1069,7 @@
           <a:p>
             <a:fld id="{A1E45834-53BD-4C8F-B791-CD5378F4150E}" type="datetimeFigureOut">
               <a:rPr lang="en-US" smtClean="0"/>
-              <a:t>4/26/2026</a:t>
+              <a:t>4/29/2026</a:t>
             </a:fld>
             <a:endParaRPr lang="en-US"/>
           </a:p>
@@ -1339,7 +1347,7 @@
           <a:p>
             <a:fld id="{A1E45834-53BD-4C8F-B791-CD5378F4150E}" type="datetimeFigureOut">
               <a:rPr lang="en-US" smtClean="0"/>
-              <a:t>4/26/2026</a:t>
+              <a:t>4/29/2026</a:t>
             </a:fld>
             <a:endParaRPr lang="en-US"/>
           </a:p>
@@ -1536,7 +1544,7 @@
           <a:p>
             <a:fld id="{A1E45834-53BD-4C8F-B791-CD5378F4150E}" type="datetimeFigureOut">
               <a:rPr lang="en-US" smtClean="0"/>
-              <a:t>4/26/2026</a:t>
+              <a:t>4/29/2026</a:t>
             </a:fld>
             <a:endParaRPr lang="en-US"/>
           </a:p>
@@ -1807,7 +1815,7 @@
           <a:p>
             <a:fld id="{A1E45834-53BD-4C8F-B791-CD5378F4150E}" type="datetimeFigureOut">
               <a:rPr lang="en-US" smtClean="0"/>
-              <a:t>4/26/2026</a:t>
+              <a:t>4/29/2026</a:t>
             </a:fld>
             <a:endParaRPr lang="en-US"/>
           </a:p>
@@ -2142,7 +2150,7 @@
           <a:p>
             <a:fld id="{A1E45834-53BD-4C8F-B791-CD5378F4150E}" type="datetimeFigureOut">
               <a:rPr lang="en-US" smtClean="0"/>
-              <a:t>4/26/2026</a:t>
+              <a:t>4/29/2026</a:t>
             </a:fld>
             <a:endParaRPr lang="en-US"/>
           </a:p>
@@ -2755,7 +2763,7 @@
           <a:p>
             <a:fld id="{A1E45834-53BD-4C8F-B791-CD5378F4150E}" type="datetimeFigureOut">
               <a:rPr lang="en-US" smtClean="0"/>
-              <a:t>4/26/2026</a:t>
+              <a:t>4/29/2026</a:t>
             </a:fld>
             <a:endParaRPr lang="en-US"/>
           </a:p>
@@ -3605,7 +3613,7 @@
           <a:p>
             <a:fld id="{A1E45834-53BD-4C8F-B791-CD5378F4150E}" type="datetimeFigureOut">
               <a:rPr lang="en-US" smtClean="0"/>
-              <a:t>4/26/2026</a:t>
+              <a:t>4/29/2026</a:t>
             </a:fld>
             <a:endParaRPr lang="en-US"/>
           </a:p>
@@ -3778,7 +3786,7 @@
           <a:p>
             <a:fld id="{A1E45834-53BD-4C8F-B791-CD5378F4150E}" type="datetimeFigureOut">
               <a:rPr lang="en-US" smtClean="0"/>
-              <a:t>4/26/2026</a:t>
+              <a:t>4/29/2026</a:t>
             </a:fld>
             <a:endParaRPr lang="en-US"/>
           </a:p>
@@ -3961,7 +3969,7 @@
           <a:p>
             <a:fld id="{A1E45834-53BD-4C8F-B791-CD5378F4150E}" type="datetimeFigureOut">
               <a:rPr lang="en-US" smtClean="0"/>
-              <a:t>4/26/2026</a:t>
+              <a:t>4/29/2026</a:t>
             </a:fld>
             <a:endParaRPr lang="en-US"/>
           </a:p>
@@ -5156,7 +5164,7 @@
           <a:p>
             <a:fld id="{A1E45834-53BD-4C8F-B791-CD5378F4150E}" type="datetimeFigureOut">
               <a:rPr lang="en-US" smtClean="0"/>
-              <a:t>4/26/2026</a:t>
+              <a:t>4/29/2026</a:t>
             </a:fld>
             <a:endParaRPr lang="en-US"/>
           </a:p>
@@ -5403,7 +5411,7 @@
           <a:p>
             <a:fld id="{A1E45834-53BD-4C8F-B791-CD5378F4150E}" type="datetimeFigureOut">
               <a:rPr lang="en-US" smtClean="0"/>
-              <a:t>4/26/2026</a:t>
+              <a:t>4/29/2026</a:t>
             </a:fld>
             <a:endParaRPr lang="en-US"/>
           </a:p>
@@ -5698,7 +5706,7 @@
           <a:p>
             <a:fld id="{A1E45834-53BD-4C8F-B791-CD5378F4150E}" type="datetimeFigureOut">
               <a:rPr lang="en-US" smtClean="0"/>
-              <a:t>4/26/2026</a:t>
+              <a:t>4/29/2026</a:t>
             </a:fld>
             <a:endParaRPr lang="en-US"/>
           </a:p>
@@ -6139,7 +6147,7 @@
           <a:p>
             <a:fld id="{A1E45834-53BD-4C8F-B791-CD5378F4150E}" type="datetimeFigureOut">
               <a:rPr lang="en-US" smtClean="0"/>
-              <a:t>4/26/2026</a:t>
+              <a:t>4/29/2026</a:t>
             </a:fld>
             <a:endParaRPr lang="en-US"/>
           </a:p>
@@ -6260,7 +6268,7 @@
           <a:p>
             <a:fld id="{A1E45834-53BD-4C8F-B791-CD5378F4150E}" type="datetimeFigureOut">
               <a:rPr lang="en-US" smtClean="0"/>
-              <a:t>4/26/2026</a:t>
+              <a:t>4/29/2026</a:t>
             </a:fld>
             <a:endParaRPr lang="en-US"/>
           </a:p>
@@ -6358,7 +6366,7 @@
           <a:p>
             <a:fld id="{A1E45834-53BD-4C8F-B791-CD5378F4150E}" type="datetimeFigureOut">
               <a:rPr lang="en-US" smtClean="0"/>
-              <a:t>4/26/2026</a:t>
+              <a:t>4/29/2026</a:t>
             </a:fld>
             <a:endParaRPr lang="en-US"/>
           </a:p>
@@ -6640,7 +6648,7 @@
           <a:p>
             <a:fld id="{A1E45834-53BD-4C8F-B791-CD5378F4150E}" type="datetimeFigureOut">
               <a:rPr lang="en-US" smtClean="0"/>
-              <a:t>4/26/2026</a:t>
+              <a:t>4/29/2026</a:t>
             </a:fld>
             <a:endParaRPr lang="en-US"/>
           </a:p>
@@ -6918,7 +6926,7 @@
           <a:p>
             <a:fld id="{A1E45834-53BD-4C8F-B791-CD5378F4150E}" type="datetimeFigureOut">
               <a:rPr lang="en-US" smtClean="0"/>
-              <a:t>4/26/2026</a:t>
+              <a:t>4/29/2026</a:t>
             </a:fld>
             <a:endParaRPr lang="en-US"/>
           </a:p>
@@ -7364,7 +7372,7 @@
           <a:p>
             <a:fld id="{A1E45834-53BD-4C8F-B791-CD5378F4150E}" type="datetimeFigureOut">
               <a:rPr lang="en-US" smtClean="0"/>
-              <a:t>4/26/2026</a:t>
+              <a:t>4/29/2026</a:t>
             </a:fld>
             <a:endParaRPr lang="en-US"/>
           </a:p>
